--- a/system-design-101/vi/lessons/sd-09-010/slides/sd-09-010.pptx
+++ b/system-design-101/vi/lessons/sd-09-010/slides/sd-09-010.pptx
@@ -1940,6 +1940,17 @@
               <a:t> đang</a:t>
             </a:r>
             <a:r>
+              <a:rPr lang="en-US" sz="3000" dirty="0" spc="-9" kern="0">
+                <a:solidFill>
+                  <a:srgbClr val="E4E1D8"/>
+                </a:solidFill>
+                <a:latin typeface="Be Vietnam Pro" pitchFamily="34" charset="0"/>
+                <a:ea typeface="Be Vietnam Pro" pitchFamily="34" charset="-122"/>
+                <a:cs typeface="Be Vietnam Pro" pitchFamily="34" charset="-120"/>
+              </a:rPr>
+              <a:t> chạy?</a:t>
+            </a:r>
+            <a:r>
               <a:rPr lang="en-US" sz="3000" dirty="0" spc="-8" kern="0">
                 <a:solidFill>
                   <a:srgbClr val="E4E1D8"/>
@@ -1948,32 +1959,10 @@
                 <a:ea typeface="Be Vietnam Pro" pitchFamily="34" charset="-122"/>
                 <a:cs typeface="Be Vietnam Pro" pitchFamily="34" charset="-120"/>
               </a:rPr>
-              <a:t> chạy,</a:t>
-            </a:r>
-            <a:r>
-              <a:rPr lang="en-US" sz="3000" dirty="0" spc="-20" kern="0">
-                <a:solidFill>
-                  <a:srgbClr val="E4E1D8"/>
-                </a:solidFill>
-                <a:latin typeface="Be Vietnam Pro" pitchFamily="34" charset="0"/>
-                <a:ea typeface="Be Vietnam Pro" pitchFamily="34" charset="-122"/>
-                <a:cs typeface="Be Vietnam Pro" pitchFamily="34" charset="-120"/>
-              </a:rPr>
-              <a:t> và</a:t>
-            </a:r>
-            <a:r>
-              <a:rPr lang="en-US" sz="3000" dirty="0" spc="-7" kern="0">
-                <a:solidFill>
-                  <a:srgbClr val="E4E1D8"/>
-                </a:solidFill>
-                <a:latin typeface="Be Vietnam Pro" pitchFamily="34" charset="0"/>
-                <a:ea typeface="Be Vietnam Pro" pitchFamily="34" charset="-122"/>
-                <a:cs typeface="Be Vietnam Pro" pitchFamily="34" charset="-120"/>
-              </a:rPr>
-              <a:t> quay</a:t>
-            </a:r>
-            <a:r>
-              <a:rPr lang="en-US" sz="3000" dirty="0" spc="1" kern="0">
+              <a:t> Quay</a:t>
+            </a:r>
+            <a:r>
+              <a:rPr lang="en-US" sz="3000" dirty="0" spc="2" kern="0">
                 <a:solidFill>
                   <a:srgbClr val="E4E1D8"/>
                 </a:solidFill>
@@ -4587,7 +4576,7 @@
               <a:t> rủi</a:t>
             </a:r>
             <a:r>
-              <a:rPr lang="en-US" sz="2250" b="1" dirty="0" spc="-9" kern="0">
+              <a:rPr lang="en-US" sz="2250" b="1" dirty="0" spc="-13" kern="0">
                 <a:solidFill>
                   <a:srgbClr val="14161C"/>
                 </a:solidFill>
@@ -4595,10 +4584,10 @@
                 <a:ea typeface="Be Vietnam Pro" pitchFamily="34" charset="-122"/>
                 <a:cs typeface="Be Vietnam Pro" pitchFamily="34" charset="-120"/>
               </a:rPr>
-              <a:t> ro,</a:t>
-            </a:r>
-            <a:r>
-              <a:rPr lang="en-US" sz="2250" b="1" dirty="0" spc="-6" kern="0">
+              <a:t> ro</a:t>
+            </a:r>
+            <a:r>
+              <a:rPr lang="en-US" sz="2250" b="1" dirty="0" spc="12" kern="0">
                 <a:solidFill>
                   <a:srgbClr val="14161C"/>
                 </a:solidFill>
@@ -4606,10 +4595,10 @@
                 <a:ea typeface="Be Vietnam Pro" pitchFamily="34" charset="-122"/>
                 <a:cs typeface="Be Vietnam Pro" pitchFamily="34" charset="-120"/>
               </a:rPr>
-              <a:t> không</a:t>
-            </a:r>
-            <a:r>
-              <a:rPr lang="en-US" sz="2250" b="1" dirty="0" spc="-1" kern="0">
+              <a:t> thực</a:t>
+            </a:r>
+            <a:r>
+              <a:rPr lang="en-US" sz="2250" b="1" dirty="0" spc="-3" kern="0">
                 <a:solidFill>
                   <a:srgbClr val="14161C"/>
                 </a:solidFill>
@@ -4617,29 +4606,7 @@
                 <a:ea typeface="Be Vietnam Pro" pitchFamily="34" charset="-122"/>
                 <a:cs typeface="Be Vietnam Pro" pitchFamily="34" charset="-120"/>
               </a:rPr>
-              <a:t> theo số</a:t>
-            </a:r>
-            <a:r>
-              <a:rPr lang="en-US" sz="2250" b="1" dirty="0" spc="0" kern="0">
-                <a:solidFill>
-                  <a:srgbClr val="14161C"/>
-                </a:solidFill>
-                <a:latin typeface="Be Vietnam Pro" pitchFamily="34" charset="0"/>
-                <a:ea typeface="Be Vietnam Pro" pitchFamily="34" charset="-122"/>
-                <a:cs typeface="Be Vietnam Pro" pitchFamily="34" charset="-120"/>
-              </a:rPr>
-              <a:t> nhân</a:t>
-            </a:r>
-            <a:r>
-              <a:rPr lang="en-US" sz="2250" b="1" dirty="0" spc="-2" kern="0">
-                <a:solidFill>
-                  <a:srgbClr val="14161C"/>
-                </a:solidFill>
-                <a:latin typeface="Be Vietnam Pro" pitchFamily="34" charset="0"/>
-                <a:ea typeface="Be Vietnam Pro" pitchFamily="34" charset="-122"/>
-                <a:cs typeface="Be Vietnam Pro" pitchFamily="34" charset="-120"/>
-              </a:rPr>
-              <a:t> viên</a:t>
+              <a:t> tế</a:t>
             </a:r>
             <a:endParaRPr lang="en-US" sz="2250" dirty="0"/>
           </a:p>
@@ -6429,10 +6396,10 @@
                 <a:ea typeface="Be Vietnam Pro" pitchFamily="34" charset="-122"/>
                 <a:cs typeface="Be Vietnam Pro" pitchFamily="34" charset="-120"/>
               </a:rPr>
-              <a:t> mỗi khi có</a:t>
-            </a:r>
-            <a:r>
-              <a:rPr lang="en-US" sz="2550" dirty="0" spc="-8" kern="0">
+              <a:t> mỗi</a:t>
+            </a:r>
+            <a:r>
+              <a:rPr lang="en-US" sz="2550" dirty="0" spc="-7" kern="0">
                 <a:solidFill>
                   <a:srgbClr val="14161C"/>
                 </a:solidFill>
@@ -6443,7 +6410,7 @@
               <a:t> thay</a:t>
             </a:r>
             <a:r>
-              <a:rPr lang="en-US" sz="2550" dirty="0" spc="13" kern="0">
+              <a:rPr lang="en-US" sz="2550" dirty="0" spc="12" kern="0">
                 <a:solidFill>
                   <a:srgbClr val="14161C"/>
                 </a:solidFill>
@@ -8195,7 +8162,7 @@
               <a:t> thể</a:t>
             </a:r>
             <a:r>
-              <a:rPr lang="en-US" sz="2250" dirty="0" spc="1" kern="0">
+              <a:rPr lang="en-US" sz="2250" dirty="0" spc="11" kern="0">
                 <a:solidFill>
                   <a:srgbClr val="6B6A66"/>
                 </a:solidFill>
@@ -8203,10 +8170,10 @@
                 <a:ea typeface="Be Vietnam Pro" pitchFamily="34" charset="-122"/>
                 <a:cs typeface="Be Vietnam Pro" pitchFamily="34" charset="-120"/>
               </a:rPr>
-              <a:t> cung</a:t>
-            </a:r>
-            <a:r>
-              <a:rPr lang="en-US" sz="2250" dirty="0" spc="2" kern="0">
+              <a:t> đảm</a:t>
+            </a:r>
+            <a:r>
+              <a:rPr lang="en-US" sz="2250" dirty="0" spc="-1" kern="0">
                 <a:solidFill>
                   <a:srgbClr val="6B6A66"/>
                 </a:solidFill>
@@ -8214,10 +8181,10 @@
                 <a:ea typeface="Be Vietnam Pro" pitchFamily="34" charset="-122"/>
                 <a:cs typeface="Be Vietnam Pro" pitchFamily="34" charset="-120"/>
               </a:rPr>
-              <a:t> cấp</a:t>
-            </a:r>
-            <a:r>
-              <a:rPr lang="en-US" sz="2250" dirty="0" spc="-1" kern="0">
+              <a:t> nhiều</a:t>
+            </a:r>
+            <a:r>
+              <a:rPr lang="en-US" sz="2250" dirty="0" spc="-14" kern="0">
                 <a:solidFill>
                   <a:srgbClr val="6B6A66"/>
                 </a:solidFill>
@@ -8225,10 +8192,10 @@
                 <a:ea typeface="Be Vietnam Pro" pitchFamily="34" charset="-122"/>
                 <a:cs typeface="Be Vietnam Pro" pitchFamily="34" charset="-120"/>
               </a:rPr>
-              <a:t> nhiều</a:t>
-            </a:r>
-            <a:r>
-              <a:rPr lang="en-US" sz="2250" dirty="0" spc="-14" kern="0">
+              <a:t> vai</a:t>
+            </a:r>
+            <a:r>
+              <a:rPr lang="en-US" sz="2250" dirty="0" spc="-16" kern="0">
                 <a:solidFill>
                   <a:srgbClr val="6B6A66"/>
                 </a:solidFill>
@@ -8236,29 +8203,7 @@
                 <a:ea typeface="Be Vietnam Pro" pitchFamily="34" charset="-122"/>
                 <a:cs typeface="Be Vietnam Pro" pitchFamily="34" charset="-120"/>
               </a:rPr>
-              <a:t> vai</a:t>
-            </a:r>
-            <a:r>
-              <a:rPr lang="en-US" sz="2250" dirty="0" spc="-21" kern="0">
-                <a:solidFill>
-                  <a:srgbClr val="6B6A66"/>
-                </a:solidFill>
-                <a:latin typeface="Be Vietnam Pro" pitchFamily="34" charset="0"/>
-                <a:ea typeface="Be Vietnam Pro" pitchFamily="34" charset="-122"/>
-                <a:cs typeface="Be Vietnam Pro" pitchFamily="34" charset="-120"/>
-              </a:rPr>
-              <a:t> trò</a:t>
-            </a:r>
-            <a:r>
-              <a:rPr lang="en-US" sz="2250" dirty="0" spc="3" kern="0">
-                <a:solidFill>
-                  <a:srgbClr val="6B6A66"/>
-                </a:solidFill>
-                <a:latin typeface="Be Vietnam Pro" pitchFamily="34" charset="0"/>
-                <a:ea typeface="Be Vietnam Pro" pitchFamily="34" charset="-122"/>
-                <a:cs typeface="Be Vietnam Pro" pitchFamily="34" charset="-120"/>
-              </a:rPr>
-              <a:t> cùng lúc.</a:t>
+              <a:t> trò.</a:t>
             </a:r>
             <a:endParaRPr lang="en-US" sz="2250" dirty="0"/>
           </a:p>
@@ -9490,10 +9435,10 @@
                 <a:ea typeface="Be Vietnam Pro" pitchFamily="34" charset="-122"/>
                 <a:cs typeface="Be Vietnam Pro" pitchFamily="34" charset="-120"/>
               </a:rPr>
-              <a:t> lý khi</a:t>
-            </a:r>
-            <a:r>
-              <a:rPr lang="en-US" sz="2250" b="1" dirty="0" spc="4" kern="0">
+              <a:t> lý</a:t>
+            </a:r>
+            <a:r>
+              <a:rPr lang="en-US" sz="2250" b="1" dirty="0" spc="-1" kern="0">
                 <a:solidFill>
                   <a:srgbClr val="FFB454"/>
                 </a:solidFill>
@@ -9501,7 +9446,29 @@
                 <a:ea typeface="Be Vietnam Pro" pitchFamily="34" charset="-122"/>
                 <a:cs typeface="Be Vietnam Pro" pitchFamily="34" charset="-120"/>
               </a:rPr>
-              <a:t> triển</a:t>
+              <a:t> lỗi?</a:t>
+            </a:r>
+            <a:r>
+              <a:rPr lang="en-US" sz="2250" b="1" dirty="0" spc="-2" kern="0">
+                <a:solidFill>
+                  <a:srgbClr val="FFB454"/>
+                </a:solidFill>
+                <a:latin typeface="Be Vietnam Pro" pitchFamily="34" charset="0"/>
+                <a:ea typeface="Be Vietnam Pro" pitchFamily="34" charset="-122"/>
+                <a:cs typeface="Be Vietnam Pro" pitchFamily="34" charset="-120"/>
+              </a:rPr>
+              <a:t> Bằng</a:t>
+            </a:r>
+            <a:r>
+              <a:rPr lang="en-US" sz="2250" b="1" dirty="0" spc="18" kern="0">
+                <a:solidFill>
+                  <a:srgbClr val="FFB454"/>
+                </a:solidFill>
+                <a:latin typeface="Be Vietnam Pro" pitchFamily="34" charset="0"/>
+                <a:ea typeface="Be Vietnam Pro" pitchFamily="34" charset="-122"/>
+                <a:cs typeface="Be Vietnam Pro" pitchFamily="34" charset="-120"/>
+              </a:rPr>
+              <a:t> chứng</a:t>
             </a:r>
             <a:r>
               <a:rPr lang="en-US" sz="2250" b="1" dirty="0" spc="3" kern="0">
@@ -9512,10 +9479,10 @@
                 <a:ea typeface="Be Vietnam Pro" pitchFamily="34" charset="-122"/>
                 <a:cs typeface="Be Vietnam Pro" pitchFamily="34" charset="-120"/>
               </a:rPr>
-              <a:t> khai</a:t>
-            </a:r>
-            <a:r>
-              <a:rPr lang="en-US" sz="2250" b="1" dirty="0" spc="-1" kern="0">
+              <a:t> nào</a:t>
+            </a:r>
+            <a:r>
+              <a:rPr lang="en-US" sz="2250" b="1" dirty="0" spc="9" kern="0">
                 <a:solidFill>
                   <a:srgbClr val="FFB454"/>
                 </a:solidFill>
@@ -9523,51 +9490,7 @@
                 <a:ea typeface="Be Vietnam Pro" pitchFamily="34" charset="-122"/>
                 <a:cs typeface="Be Vietnam Pro" pitchFamily="34" charset="-120"/>
               </a:rPr>
-              <a:t> lỗi?</a:t>
-            </a:r>
-            <a:r>
-              <a:rPr lang="en-US" sz="2250" b="1" dirty="0" spc="-3" kern="0">
-                <a:solidFill>
-                  <a:srgbClr val="FFB454"/>
-                </a:solidFill>
-                <a:latin typeface="Be Vietnam Pro" pitchFamily="34" charset="0"/>
-                <a:ea typeface="Be Vietnam Pro" pitchFamily="34" charset="-122"/>
-                <a:cs typeface="Be Vietnam Pro" pitchFamily="34" charset="-120"/>
-              </a:rPr>
-              <a:t> Bằng</a:t>
-            </a:r>
-            <a:r>
-              <a:rPr lang="en-US" sz="2250" b="1" dirty="0" spc="19" kern="0">
-                <a:solidFill>
-                  <a:srgbClr val="FFB454"/>
-                </a:solidFill>
-                <a:latin typeface="Be Vietnam Pro" pitchFamily="34" charset="0"/>
-                <a:ea typeface="Be Vietnam Pro" pitchFamily="34" charset="-122"/>
-                <a:cs typeface="Be Vietnam Pro" pitchFamily="34" charset="-120"/>
-              </a:rPr>
-              <a:t> chứng</a:t>
-            </a:r>
-            <a:r>
-              <a:rPr lang="en-US" sz="2250" b="1" dirty="0" spc="2" kern="0">
-                <a:solidFill>
-                  <a:srgbClr val="FFB454"/>
-                </a:solidFill>
-                <a:latin typeface="Be Vietnam Pro" pitchFamily="34" charset="0"/>
-                <a:ea typeface="Be Vietnam Pro" pitchFamily="34" charset="-122"/>
-                <a:cs typeface="Be Vietnam Pro" pitchFamily="34" charset="-120"/>
-              </a:rPr>
-              <a:t> nào</a:t>
-            </a:r>
-            <a:r>
-              <a:rPr lang="en-US" sz="2250" b="1" dirty="0" spc="1" kern="0">
-                <a:solidFill>
-                  <a:srgbClr val="FFB454"/>
-                </a:solidFill>
-                <a:latin typeface="Be Vietnam Pro" pitchFamily="34" charset="0"/>
-                <a:ea typeface="Be Vietnam Pro" pitchFamily="34" charset="-122"/>
-                <a:cs typeface="Be Vietnam Pro" pitchFamily="34" charset="-120"/>
-              </a:rPr>
-              <a:t> cho</a:t>
+              <a:t> để</a:t>
             </a:r>
             <a:r>
               <a:rPr lang="en-US" sz="2250" b="1" dirty="0" spc="0" kern="0">
@@ -10343,7 +10266,7 @@
               <a:t> nhỏ</a:t>
             </a:r>
             <a:r>
-              <a:rPr lang="en-US" sz="2400" b="1" dirty="0" spc="-13" kern="0">
+              <a:rPr lang="en-US" sz="2400" b="1" dirty="0" spc="1" kern="0">
                 <a:solidFill>
                   <a:srgbClr val="FFB454"/>
                 </a:solidFill>
@@ -10351,7 +10274,7 @@
                 <a:ea typeface="Be Vietnam Pro" pitchFamily="34" charset="-122"/>
                 <a:cs typeface="Be Vietnam Pro" pitchFamily="34" charset="-120"/>
               </a:rPr>
-              <a:t> vận</a:t>
+              <a:t> làm</a:t>
             </a:r>
             <a:r>
               <a:rPr lang="en-US" sz="2400" b="1" dirty="0" spc="-2" kern="0">
@@ -10362,10 +10285,10 @@
                 <a:ea typeface="Be Vietnam Pro" pitchFamily="34" charset="-122"/>
                 <a:cs typeface="Be Vietnam Pro" pitchFamily="34" charset="-120"/>
               </a:rPr>
-              <a:t> hành</a:t>
-            </a:r>
-            <a:r>
-              <a:rPr lang="en-US" sz="2400" b="1" dirty="0" spc="-1" kern="0">
+              <a:t> thanh</a:t>
+            </a:r>
+            <a:r>
+              <a:rPr lang="en-US" sz="2400" b="1" dirty="0" spc="-3" kern="0">
                 <a:solidFill>
                   <a:srgbClr val="FFB454"/>
                 </a:solidFill>
@@ -10373,21 +10296,10 @@
                 <a:ea typeface="Be Vietnam Pro" pitchFamily="34" charset="-122"/>
                 <a:cs typeface="Be Vietnam Pro" pitchFamily="34" charset="-120"/>
               </a:rPr>
-              <a:t> thanh</a:t>
-            </a:r>
-            <a:r>
-              <a:rPr lang="en-US" sz="2400" b="1" dirty="0" spc="-3" kern="0">
-                <a:solidFill>
-                  <a:srgbClr val="FFB454"/>
-                </a:solidFill>
-                <a:latin typeface="Be Vietnam Pro" pitchFamily="34" charset="0"/>
-                <a:ea typeface="Be Vietnam Pro" pitchFamily="34" charset="-122"/>
-                <a:cs typeface="Be Vietnam Pro" pitchFamily="34" charset="-120"/>
-              </a:rPr>
               <a:t> toán</a:t>
             </a:r>
             <a:r>
-              <a:rPr lang="en-US" sz="2400" b="1" dirty="0" spc="-13" kern="0">
+              <a:rPr lang="en-US" sz="2400" b="1" dirty="0" spc="-12" kern="0">
                 <a:solidFill>
                   <a:srgbClr val="FFB454"/>
                 </a:solidFill>
@@ -10514,7 +10426,7 @@
               <a:t> chỉ</a:t>
             </a:r>
             <a:r>
-              <a:rPr lang="en-US" sz="2400" dirty="0" spc="0" kern="0">
+              <a:rPr lang="en-US" sz="2400" dirty="0" spc="-2" kern="0">
                 <a:solidFill>
                   <a:srgbClr val="E4E1D8"/>
                 </a:solidFill>
@@ -10522,10 +10434,10 @@
                 <a:ea typeface="Be Vietnam Pro" pitchFamily="34" charset="-122"/>
                 <a:cs typeface="Be Vietnam Pro" pitchFamily="34" charset="-120"/>
               </a:rPr>
-              <a:t> có ích</a:t>
-            </a:r>
-            <a:r>
-              <a:rPr lang="en-US" sz="2400" dirty="0" spc="-3" kern="0">
+              <a:t> khi</a:t>
+            </a:r>
+            <a:r>
+              <a:rPr lang="en-US" sz="2400" dirty="0" spc="1" kern="0">
                 <a:solidFill>
                   <a:srgbClr val="E4E1D8"/>
                 </a:solidFill>
@@ -10533,7 +10445,29 @@
                 <a:ea typeface="Be Vietnam Pro" pitchFamily="34" charset="-122"/>
                 <a:cs typeface="Be Vietnam Pro" pitchFamily="34" charset="-120"/>
               </a:rPr>
-              <a:t> khi</a:t>
+              <a:t> giải</a:t>
+            </a:r>
+            <a:r>
+              <a:rPr lang="en-US" sz="2400" dirty="0" spc="-18" kern="0">
+                <a:solidFill>
+                  <a:srgbClr val="E4E1D8"/>
+                </a:solidFill>
+                <a:latin typeface="Be Vietnam Pro" pitchFamily="34" charset="0"/>
+                <a:ea typeface="Be Vietnam Pro" pitchFamily="34" charset="-122"/>
+                <a:cs typeface="Be Vietnam Pro" pitchFamily="34" charset="-120"/>
+              </a:rPr>
+              <a:t> quyết</a:t>
+            </a:r>
+            <a:r>
+              <a:rPr lang="en-US" sz="2400" dirty="0" spc="20" kern="0">
+                <a:solidFill>
+                  <a:srgbClr val="E4E1D8"/>
+                </a:solidFill>
+                <a:latin typeface="Be Vietnam Pro" pitchFamily="34" charset="0"/>
+                <a:ea typeface="Be Vietnam Pro" pitchFamily="34" charset="-122"/>
+                <a:cs typeface="Be Vietnam Pro" pitchFamily="34" charset="-120"/>
+              </a:rPr>
+              <a:t> điểm</a:t>
             </a:r>
             <a:r>
               <a:rPr lang="en-US" sz="2400" dirty="0" spc="1" kern="0">
@@ -10544,62 +10478,7 @@
                 <a:ea typeface="Be Vietnam Pro" pitchFamily="34" charset="-122"/>
                 <a:cs typeface="Be Vietnam Pro" pitchFamily="34" charset="-120"/>
               </a:rPr>
-              <a:t> giải</a:t>
-            </a:r>
-            <a:r>
-              <a:rPr lang="en-US" sz="2400" dirty="0" spc="-18" kern="0">
-                <a:solidFill>
-                  <a:srgbClr val="E4E1D8"/>
-                </a:solidFill>
-                <a:latin typeface="Be Vietnam Pro" pitchFamily="34" charset="0"/>
-                <a:ea typeface="Be Vietnam Pro" pitchFamily="34" charset="-122"/>
-                <a:cs typeface="Be Vietnam Pro" pitchFamily="34" charset="-120"/>
-              </a:rPr>
-              <a:t> quyết</a:t>
-            </a:r>
-            <a:r>
-              <a:rPr lang="en-US" sz="2400" dirty="0" spc="20" kern="0">
-                <a:solidFill>
-                  <a:srgbClr val="E4E1D8"/>
-                </a:solidFill>
-                <a:latin typeface="Be Vietnam Pro" pitchFamily="34" charset="0"/>
-                <a:ea typeface="Be Vietnam Pro" pitchFamily="34" charset="-122"/>
-                <a:cs typeface="Be Vietnam Pro" pitchFamily="34" charset="-120"/>
-              </a:rPr>
-              <a:t> điểm</a:t>
-            </a:r>
-            <a:r>
-              <a:rPr lang="en-US" sz="2400" dirty="0" spc="1" kern="0">
-                <a:solidFill>
-                  <a:srgbClr val="E4E1D8"/>
-                </a:solidFill>
-                <a:latin typeface="Be Vietnam Pro" pitchFamily="34" charset="0"/>
-                <a:ea typeface="Be Vietnam Pro" pitchFamily="34" charset="-122"/>
-                <a:cs typeface="Be Vietnam Pro" pitchFamily="34" charset="-120"/>
-              </a:rPr>
-              <a:t> nghẽn</a:t>
-            </a:r>
-            <a:r>
-              <a:rPr lang="en-US" sz="2400" dirty="0" spc="2" kern="0">
-                <a:solidFill>
-                  <a:srgbClr val="E4E1D8"/>
-                </a:solidFill>
-                <a:latin typeface="Be Vietnam Pro" pitchFamily="34" charset="0"/>
-                <a:ea typeface="Be Vietnam Pro" pitchFamily="34" charset="-122"/>
-                <a:cs typeface="Be Vietnam Pro" pitchFamily="34" charset="-120"/>
-              </a:rPr>
-              <a:t> cụ</a:t>
-            </a:r>
-            <a:r>
-              <a:rPr lang="en-US" sz="2400" dirty="0" spc="0" kern="0">
-                <a:solidFill>
-                  <a:srgbClr val="E4E1D8"/>
-                </a:solidFill>
-                <a:latin typeface="Be Vietnam Pro" pitchFamily="34" charset="0"/>
-                <a:ea typeface="Be Vietnam Pro" pitchFamily="34" charset="-122"/>
-                <a:cs typeface="Be Vietnam Pro" pitchFamily="34" charset="-120"/>
-              </a:rPr>
-              <a:t> thể.</a:t>
+              <a:t> nghẽn.</a:t>
             </a:r>
             <a:endParaRPr lang="en-US" sz="2400" dirty="0"/>
           </a:p>
@@ -12798,7 +12677,7 @@
               <a:buNone/>
             </a:pPr>
             <a:r>
-              <a:rPr lang="en-US" sz="2250" b="1" dirty="0" spc="5" kern="0">
+              <a:rPr lang="en-US" sz="2250" b="1" dirty="0" spc="-14" kern="0">
                 <a:solidFill>
                   <a:srgbClr val="E8472B"/>
                 </a:solidFill>
@@ -12806,7 +12685,7 @@
                 <a:ea typeface="Be Vietnam Pro" pitchFamily="34" charset="-122"/>
                 <a:cs typeface="Be Vietnam Pro" pitchFamily="34" charset="-120"/>
               </a:rPr>
-              <a:t>Có</a:t>
+              <a:t>Rollback</a:t>
             </a:r>
             <a:r>
               <a:rPr lang="en-US" sz="2250" b="1" dirty="0" spc="-4" kern="0">
@@ -12817,10 +12696,54 @@
                 <a:ea typeface="Be Vietnam Pro" pitchFamily="34" charset="-122"/>
                 <a:cs typeface="Be Vietnam Pro" pitchFamily="34" charset="-120"/>
               </a:rPr>
+              <a:t> code</a:t>
+            </a:r>
+            <a:r>
+              <a:rPr lang="en-US" sz="2250" b="1" dirty="0" spc="-6" kern="0">
+                <a:solidFill>
+                  <a:srgbClr val="E8472B"/>
+                </a:solidFill>
+                <a:latin typeface="Be Vietnam Pro" pitchFamily="34" charset="0"/>
+                <a:ea typeface="Be Vietnam Pro" pitchFamily="34" charset="-122"/>
+                <a:cs typeface="Be Vietnam Pro" pitchFamily="34" charset="-120"/>
+              </a:rPr>
+              <a:t> không</a:t>
+            </a:r>
+            <a:r>
+              <a:rPr lang="en-US" sz="2250" b="1" dirty="0" spc="12" kern="0">
+                <a:solidFill>
+                  <a:srgbClr val="E8472B"/>
+                </a:solidFill>
+                <a:latin typeface="Be Vietnam Pro" pitchFamily="34" charset="0"/>
+                <a:ea typeface="Be Vietnam Pro" pitchFamily="34" charset="-122"/>
+                <a:cs typeface="Be Vietnam Pro" pitchFamily="34" charset="-120"/>
+              </a:rPr>
+              <a:t> đảo được</a:t>
+            </a:r>
+            <a:r>
+              <a:rPr lang="en-US" sz="2250" b="1" dirty="0" spc="0" kern="0">
+                <a:solidFill>
+                  <a:srgbClr val="E8472B"/>
+                </a:solidFill>
+                <a:latin typeface="Be Vietnam Pro" pitchFamily="34" charset="0"/>
+                <a:ea typeface="Be Vietnam Pro" pitchFamily="34" charset="-122"/>
+                <a:cs typeface="Be Vietnam Pro" pitchFamily="34" charset="-120"/>
+              </a:rPr>
+              <a:t> mọi</a:t>
+            </a:r>
+            <a:r>
+              <a:rPr lang="en-US" sz="2250" b="1" dirty="0" spc="-4" kern="0">
+                <a:solidFill>
+                  <a:srgbClr val="E8472B"/>
+                </a:solidFill>
+                <a:latin typeface="Be Vietnam Pro" pitchFamily="34" charset="0"/>
+                <a:ea typeface="Be Vietnam Pro" pitchFamily="34" charset="-122"/>
+                <a:cs typeface="Be Vietnam Pro" pitchFamily="34" charset="-120"/>
+              </a:rPr>
               <a:t> thay</a:t>
             </a:r>
             <a:r>
-              <a:rPr lang="en-US" sz="2250" b="1" dirty="0" spc="8" kern="0">
+              <a:rPr lang="en-US" sz="2250" b="1" dirty="0" spc="9" kern="0">
                 <a:solidFill>
                   <a:srgbClr val="E8472B"/>
                 </a:solidFill>
@@ -12831,7 +12754,7 @@
               <a:t> đổi</a:t>
             </a:r>
             <a:r>
-              <a:rPr lang="en-US" sz="2250" b="1" dirty="0" spc="4" kern="0">
+              <a:rPr lang="en-US" sz="2250" b="1" dirty="0" spc="3" kern="0">
                 <a:solidFill>
                   <a:srgbClr val="E8472B"/>
                 </a:solidFill>
@@ -12851,72 +12774,6 @@
                 <a:cs typeface="Be Vietnam Pro" pitchFamily="34" charset="-120"/>
               </a:rPr>
               <a:t> liệu</a:t>
-            </a:r>
-            <a:r>
-              <a:rPr lang="en-US" sz="2250" b="1" dirty="0" spc="0" kern="0">
-                <a:solidFill>
-                  <a:srgbClr val="E8472B"/>
-                </a:solidFill>
-                <a:latin typeface="Be Vietnam Pro" pitchFamily="34" charset="0"/>
-                <a:ea typeface="Be Vietnam Pro" pitchFamily="34" charset="-122"/>
-                <a:cs typeface="Be Vietnam Pro" pitchFamily="34" charset="-120"/>
-              </a:rPr>
-              <a:t> mà</a:t>
-            </a:r>
-            <a:r>
-              <a:rPr lang="en-US" sz="2250" b="1" dirty="0" spc="-5" kern="0">
-                <a:solidFill>
-                  <a:srgbClr val="E8472B"/>
-                </a:solidFill>
-                <a:latin typeface="Be Vietnam Pro" pitchFamily="34" charset="0"/>
-                <a:ea typeface="Be Vietnam Pro" pitchFamily="34" charset="-122"/>
-                <a:cs typeface="Be Vietnam Pro" pitchFamily="34" charset="-120"/>
-              </a:rPr>
-              <a:t> rollback</a:t>
-            </a:r>
-            <a:r>
-              <a:rPr lang="en-US" sz="2250" b="1" dirty="0" spc="-3" kern="0">
-                <a:solidFill>
-                  <a:srgbClr val="E8472B"/>
-                </a:solidFill>
-                <a:latin typeface="Be Vietnam Pro" pitchFamily="34" charset="0"/>
-                <a:ea typeface="Be Vietnam Pro" pitchFamily="34" charset="-122"/>
-                <a:cs typeface="Be Vietnam Pro" pitchFamily="34" charset="-120"/>
-              </a:rPr>
-              <a:t> code</a:t>
-            </a:r>
-            <a:r>
-              <a:rPr lang="en-US" sz="2250" b="1" dirty="0" spc="-6" kern="0">
-                <a:solidFill>
-                  <a:srgbClr val="E8472B"/>
-                </a:solidFill>
-                <a:latin typeface="Be Vietnam Pro" pitchFamily="34" charset="0"/>
-                <a:ea typeface="Be Vietnam Pro" pitchFamily="34" charset="-122"/>
-                <a:cs typeface="Be Vietnam Pro" pitchFamily="34" charset="-120"/>
-              </a:rPr>
-              <a:t> không</a:t>
-            </a:r>
-            <a:r>
-              <a:rPr lang="en-US" sz="2250" b="1" dirty="0" spc="12" kern="0">
-                <a:solidFill>
-                  <a:srgbClr val="E8472B"/>
-                </a:solidFill>
-                <a:latin typeface="Be Vietnam Pro" pitchFamily="34" charset="0"/>
-                <a:ea typeface="Be Vietnam Pro" pitchFamily="34" charset="-122"/>
-                <a:cs typeface="Be Vietnam Pro" pitchFamily="34" charset="-120"/>
-              </a:rPr>
-              <a:t> đảo</a:t>
-            </a:r>
-            <a:r>
-              <a:rPr lang="en-US" sz="2250" b="1" dirty="0" spc="11" kern="0">
-                <a:solidFill>
-                  <a:srgbClr val="E8472B"/>
-                </a:solidFill>
-                <a:latin typeface="Be Vietnam Pro" pitchFamily="34" charset="0"/>
-                <a:ea typeface="Be Vietnam Pro" pitchFamily="34" charset="-122"/>
-                <a:cs typeface="Be Vietnam Pro" pitchFamily="34" charset="-120"/>
-              </a:rPr>
-              <a:t> được</a:t>
             </a:r>
             <a:endParaRPr lang="en-US" sz="2250" dirty="0"/>
           </a:p>
